--- a/prospecção/abordagem/Argus_OnePager_SCD_Fintech.pptx
+++ b/prospecção/abordagem/Argus_OnePager_SCD_Fintech.pptx
@@ -3249,7 +3249,7 @@
                 </a:solidFill>
                 <a:latin typeface="Consolas"/>
               </a:rPr>
-              <a:t>ADMINISTRAÇÃO FIDUCIÁRIA DE FUNDOS PEQUENOS</a:t>
+              <a:t>ADMINISTRAÇÃO FIDUCIÁRIA E CUSTÓDIA DE FUNDOS</a:t>
             </a:r>
           </a:p>
         </p:txBody>
@@ -3340,7 +3340,7 @@
                 </a:solidFill>
                 <a:latin typeface="Calibri"/>
               </a:rPr>
-              <a:t>Administração fiduciária de fundos pequenos — proposta de parceria.</a:t>
+              <a:t>Administração fiduciária e custódia de fundos — proposta de parceria.</a:t>
             </a:r>
           </a:p>
         </p:txBody>
